--- a/dist/초3/수학/도형과측정/초3_수학_도형과측정_08_길이의덧셈과뺄셈.pptx
+++ b/dist/초3/수학/도형과측정/초3_수학_도형과측정_08_길이의덧셈과뺄셈.pptx
@@ -122,13 +122,13 @@
   <p:extLst>
     <p:ext uri="{521415D9-36F7-43E2-AB2F-B90AF26B5E84}">
       <p14:sectionLst xmlns:p14="http://schemas.microsoft.com/office/powerpoint/2010/main">
-        <p14:section name="도입" id="{b0f28eed-dc61-2018-5007-f51f2c66679b}">
+        <p14:section name="도입" id="{7cde95a8-b2b5-546e-521a-d348523e5171}">
           <p14:sldIdLst>
             <p14:sldId id="256"/>
             <p14:sldId id="257"/>
           </p14:sldIdLst>
         </p14:section>
-        <p14:section name="개념" id="{b86f9e41-f8b3-24c8-ae86-45d4ac9594dd}">
+        <p14:section name="개념" id="{bf7ac9f4-7ff1-806b-cf10-db6b3dcf3435}">
           <p14:sldIdLst>
             <p14:sldId id="258"/>
             <p14:sldId id="259"/>
@@ -138,32 +138,32 @@
             <p14:sldId id="265"/>
           </p14:sldIdLst>
         </p14:section>
-        <p14:section name="연습" id="{d7d851d2-7369-6398-3159-5ef6238b1cae}">
+        <p14:section name="연습" id="{cca10427-158c-1551-d3c6-0e8e0d25ea6a}">
           <p14:sldIdLst>
             <p14:sldId id="262"/>
             <p14:sldId id="263"/>
             <p14:sldId id="266"/>
           </p14:sldIdLst>
         </p14:section>
-        <p14:section name="개념" id="{0c6f822b-bb73-f567-35d2-3ab1cb5f3628}">
+        <p14:section name="개념" id="{ae9ebd7a-f10c-374f-90d1-4a36983e3fa7}">
           <p14:sldIdLst/>
         </p14:section>
-        <p14:section name="연습" id="{897ae692-ee3a-a191-a01c-20898aed3132}">
+        <p14:section name="연습" id="{fea11f69-dd45-af7b-74a8-7936141c7885}">
           <p14:sldIdLst/>
         </p14:section>
-        <p14:section name="확인" id="{8bd0dbc9-ff21-6d53-fce1-9d9f50c49262}">
+        <p14:section name="확인" id="{2a8ea31e-8233-d9e1-463a-db45b8da6d0d}">
           <p14:sldIdLst>
             <p14:sldId id="267"/>
             <p14:sldId id="268"/>
             <p14:sldId id="269"/>
           </p14:sldIdLst>
         </p14:section>
-        <p14:section name="정리" id="{b4e7db6c-7637-88dc-72b0-834434e43db4}">
+        <p14:section name="정리" id="{d04d3064-67d0-40ea-ddfe-85939566a10c}">
           <p14:sldIdLst>
             <p14:sldId id="270"/>
           </p14:sldIdLst>
         </p14:section>
-        <p14:section name="보충" id="{3cde0c1f-58f0-8426-8971-535700f23629}">
+        <p14:section name="보충" id="{94709d9b-8094-b046-5d1b-312b6cf0986e}">
           <p14:sldIdLst>
             <p14:sldId id="271"/>
           </p14:sldIdLst>
